--- a/data/ppm/master.pptx
+++ b/data/ppm/master.pptx
@@ -227,7 +227,7 @@
           <a:p>
             <a:fld id="{8CD52D10-CA29-47CE-B9E0-746F61809FC3}" type="datetimeFigureOut">
               <a:rPr lang="es-MX" smtClean="0"/>
-              <a:t>06/02/2026</a:t>
+              <a:t>09/03/2026</a:t>
             </a:fld>
             <a:endParaRPr lang="es-MX"/>
           </a:p>
@@ -3881,7 +3881,7 @@
           <p:nvPr>
             <p:extLst>
               <p:ext uri="{D42A27DB-BD31-4B8C-83A1-F6EECF244321}">
-                <p14:modId xmlns:p14="http://schemas.microsoft.com/office/powerpoint/2010/main" val="1835977106"/>
+                <p14:modId xmlns:p14="http://schemas.microsoft.com/office/powerpoint/2010/main" val="3314234119"/>
               </p:ext>
             </p:extLst>
           </p:nvPr>
@@ -4281,12 +4281,12 @@
                     <a:p>
                       <a:pPr algn="ctr"/>
                       <a:r>
-                        <a:rPr lang="es-MX" sz="800" b="1" kern="1200" dirty="0">
+                        <a:rPr lang="es-MX" sz="800" b="1" kern="1200">
                           <a:solidFill>
                             <a:schemeClr val="bg1"/>
                           </a:solidFill>
                         </a:rPr>
-                        <a:t>PPM</a:t>
+                        <a:t>PgM</a:t>
                       </a:r>
                       <a:endParaRPr lang="es-MX" sz="800" b="1" kern="1200" dirty="0">
                         <a:solidFill>
@@ -10624,23 +10624,6 @@
 </file>
 
 <file path=customXml/item1.xml><?xml version="1.0" encoding="utf-8"?>
-<p:properties xmlns:p="http://schemas.microsoft.com/office/2006/metadata/properties" xmlns:xsi="http://www.w3.org/2001/XMLSchema-instance" xmlns:pc="http://schemas.microsoft.com/office/infopath/2007/PartnerControls">
-  <documentManagement>
-    <_activity xmlns="1c64ee9a-3d2c-4644-a6c5-98774cfbbb9c" xsi:nil="true"/>
-  </documentManagement>
-</p:properties>
-</file>
-
-<file path=customXml/item2.xml><?xml version="1.0" encoding="utf-8"?>
-<?mso-contentType ?>
-<FormTemplates xmlns="http://schemas.microsoft.com/sharepoint/v3/contenttype/forms">
-  <Display>DocumentLibraryForm</Display>
-  <Edit>DocumentLibraryForm</Edit>
-  <New>DocumentLibraryForm</New>
-</FormTemplates>
-</file>
-
-<file path=customXml/item3.xml><?xml version="1.0" encoding="utf-8"?>
 <ct:contentTypeSchema xmlns:ct="http://schemas.microsoft.com/office/2006/metadata/contentType" xmlns:ma="http://schemas.microsoft.com/office/2006/metadata/properties/metaAttributes" ct:_="" ma:_="" ma:contentTypeName="Document" ma:contentTypeID="0x0101009B3668E80BD4D1448562D9B3BDCD5546" ma:contentTypeVersion="17" ma:contentTypeDescription="Create a new document." ma:contentTypeScope="" ma:versionID="643015b4e6edb2ef07354ab4194dc83d">
   <xsd:schema xmlns:xsd="http://www.w3.org/2001/XMLSchema" xmlns:xs="http://www.w3.org/2001/XMLSchema" xmlns:p="http://schemas.microsoft.com/office/2006/metadata/properties" xmlns:ns3="17db883d-5b9d-4bba-b5ef-313d48d2b51c" xmlns:ns4="1c64ee9a-3d2c-4644-a6c5-98774cfbbb9c" targetNamespace="http://schemas.microsoft.com/office/2006/metadata/properties" ma:root="true" ma:fieldsID="14bc62e15c02930d2c5a9874672ad489" ns3:_="" ns4:_="">
     <xsd:import namespace="17db883d-5b9d-4bba-b5ef-313d48d2b51c"/>
@@ -10887,32 +10870,24 @@
 </ct:contentTypeSchema>
 </file>
 
-<file path=customXml/itemProps1.xml><?xml version="1.0" encoding="utf-8"?>
-<ds:datastoreItem xmlns:ds="http://schemas.openxmlformats.org/officeDocument/2006/customXml" ds:itemID="{57D5531E-F6C4-486B-8DB3-E8B1CE0A6309}">
-  <ds:schemaRefs>
-    <ds:schemaRef ds:uri="17db883d-5b9d-4bba-b5ef-313d48d2b51c"/>
-    <ds:schemaRef ds:uri="1c64ee9a-3d2c-4644-a6c5-98774cfbbb9c"/>
-    <ds:schemaRef ds:uri="http://purl.org/dc/dcmitype/"/>
-    <ds:schemaRef ds:uri="http://purl.org/dc/elements/1.1/"/>
-    <ds:schemaRef ds:uri="http://purl.org/dc/terms/"/>
-    <ds:schemaRef ds:uri="http://schemas.microsoft.com/office/2006/documentManagement/types"/>
-    <ds:schemaRef ds:uri="http://schemas.microsoft.com/office/2006/metadata/properties"/>
-    <ds:schemaRef ds:uri="http://schemas.microsoft.com/office/infopath/2007/PartnerControls"/>
-    <ds:schemaRef ds:uri="http://schemas.openxmlformats.org/package/2006/metadata/core-properties"/>
-    <ds:schemaRef ds:uri="http://www.w3.org/XML/1998/namespace"/>
-  </ds:schemaRefs>
-</ds:datastoreItem>
+<file path=customXml/item2.xml><?xml version="1.0" encoding="utf-8"?>
+<?mso-contentType ?>
+<FormTemplates xmlns="http://schemas.microsoft.com/sharepoint/v3/contenttype/forms">
+  <Display>DocumentLibraryForm</Display>
+  <Edit>DocumentLibraryForm</Edit>
+  <New>DocumentLibraryForm</New>
+</FormTemplates>
 </file>
 
-<file path=customXml/itemProps2.xml><?xml version="1.0" encoding="utf-8"?>
-<ds:datastoreItem xmlns:ds="http://schemas.openxmlformats.org/officeDocument/2006/customXml" ds:itemID="{235F9298-0172-41E3-BDCB-A1CF29CA993F}">
-  <ds:schemaRefs>
-    <ds:schemaRef ds:uri="http://schemas.microsoft.com/sharepoint/v3/contenttype/forms"/>
-  </ds:schemaRefs>
-</ds:datastoreItem>
+<file path=customXml/item3.xml><?xml version="1.0" encoding="utf-8"?>
+<p:properties xmlns:p="http://schemas.microsoft.com/office/2006/metadata/properties" xmlns:xsi="http://www.w3.org/2001/XMLSchema-instance" xmlns:pc="http://schemas.microsoft.com/office/infopath/2007/PartnerControls">
+  <documentManagement>
+    <_activity xmlns="1c64ee9a-3d2c-4644-a6c5-98774cfbbb9c" xsi:nil="true"/>
+  </documentManagement>
+</p:properties>
 </file>
 
-<file path=customXml/itemProps3.xml><?xml version="1.0" encoding="utf-8"?>
+<file path=customXml/itemProps1.xml><?xml version="1.0" encoding="utf-8"?>
 <ds:datastoreItem xmlns:ds="http://schemas.openxmlformats.org/officeDocument/2006/customXml" ds:itemID="{60372A13-250A-4F37-BF8E-5B6068B1E67D}">
   <ds:schemaRefs>
     <ds:schemaRef ds:uri="17db883d-5b9d-4bba-b5ef-313d48d2b51c"/>
@@ -10932,6 +10907,31 @@
 </ds:datastoreItem>
 </file>
 
+<file path=customXml/itemProps2.xml><?xml version="1.0" encoding="utf-8"?>
+<ds:datastoreItem xmlns:ds="http://schemas.openxmlformats.org/officeDocument/2006/customXml" ds:itemID="{235F9298-0172-41E3-BDCB-A1CF29CA993F}">
+  <ds:schemaRefs>
+    <ds:schemaRef ds:uri="http://schemas.microsoft.com/sharepoint/v3/contenttype/forms"/>
+  </ds:schemaRefs>
+</ds:datastoreItem>
+</file>
+
+<file path=customXml/itemProps3.xml><?xml version="1.0" encoding="utf-8"?>
+<ds:datastoreItem xmlns:ds="http://schemas.openxmlformats.org/officeDocument/2006/customXml" ds:itemID="{57D5531E-F6C4-486B-8DB3-E8B1CE0A6309}">
+  <ds:schemaRefs>
+    <ds:schemaRef ds:uri="17db883d-5b9d-4bba-b5ef-313d48d2b51c"/>
+    <ds:schemaRef ds:uri="1c64ee9a-3d2c-4644-a6c5-98774cfbbb9c"/>
+    <ds:schemaRef ds:uri="http://purl.org/dc/dcmitype/"/>
+    <ds:schemaRef ds:uri="http://purl.org/dc/elements/1.1/"/>
+    <ds:schemaRef ds:uri="http://purl.org/dc/terms/"/>
+    <ds:schemaRef ds:uri="http://schemas.microsoft.com/office/2006/documentManagement/types"/>
+    <ds:schemaRef ds:uri="http://schemas.microsoft.com/office/2006/metadata/properties"/>
+    <ds:schemaRef ds:uri="http://schemas.microsoft.com/office/infopath/2007/PartnerControls"/>
+    <ds:schemaRef ds:uri="http://schemas.openxmlformats.org/package/2006/metadata/core-properties"/>
+    <ds:schemaRef ds:uri="http://www.w3.org/XML/1998/namespace"/>
+  </ds:schemaRefs>
+</ds:datastoreItem>
+</file>
+
 <file path=docMetadata/LabelInfo.xml><?xml version="1.0" encoding="utf-8"?>
 <clbl:labelList xmlns:clbl="http://schemas.microsoft.com/office/2020/mipLabelMetadata">
   <clbl:label id="{855f820d-0400-40a6-af9b-d2793512cd2f}" enabled="1" method="Standard" siteId="{5d638bf1-7afd-4f6e-a308-2245d53ac2db}" removed="0"/>
